--- a/presentation.pptx
+++ b/presentation.pptx
@@ -1800,7 +1800,7 @@
                 <a:ea typeface="Calibri" pitchFamily="34" charset="-122"/>
                 <a:cs typeface="Calibri" pitchFamily="34" charset="-120"/>
               </a:rPr>
-              <a:t>3-match validation run • 1,490 valid pose sequences • Heavy MediaPipe model • CPU training</a:t>
+              <a:t>7-match run • 3,639 valid pose sequences • Heavy MediaPipe pose • 7-class taxonomy • CPU training</a:t>
             </a:r>
             <a:endParaRPr lang="en-US" sz="1300" dirty="0"/>
           </a:p>
@@ -2021,7 +2021,7 @@
                 <a:ea typeface="Calibri" pitchFamily="34" charset="-122"/>
                 <a:cs typeface="Calibri" pitchFamily="34" charset="-120"/>
               </a:rPr>
-              <a:t>End-to-end run on 3 matches (4,048 clips → 1,490 valid sequences with heavy pose model). Both models train and converge.</a:t>
+              <a:t>End-to-end run on 7 matches (7,350 clips → 3,639 valid sequences). 7-class taxonomy (merged pose-indistinguishable classes). LSTM converges; Transformer data-starved.</a:t>
             </a:r>
             <a:endParaRPr lang="en-US" sz="1400" dirty="0"/>
           </a:p>
@@ -2402,7 +2402,7 @@
                 <a:ea typeface="Georgia" pitchFamily="34" charset="-122"/>
                 <a:cs typeface="Georgia" pitchFamily="34" charset="-120"/>
               </a:rPr>
-              <a:t>0.175</a:t>
+              <a:t>0.213</a:t>
             </a:r>
             <a:endParaRPr lang="en-US" sz="4800" dirty="0"/>
           </a:p>
@@ -2441,7 +2441,7 @@
                 <a:ea typeface="Calibri" pitchFamily="34" charset="-122"/>
                 <a:cs typeface="Calibri" pitchFamily="34" charset="-120"/>
               </a:rPr>
-              <a:t>macro-F1   |   21.9% acc</a:t>
+              <a:t>macro-F1   |   25.3% acc</a:t>
             </a:r>
             <a:endParaRPr lang="en-US" sz="1100" dirty="0"/>
           </a:p>
@@ -2544,7 +2544,7 @@
                 <a:ea typeface="Georgia" pitchFamily="34" charset="-122"/>
                 <a:cs typeface="Georgia" pitchFamily="34" charset="-120"/>
               </a:rPr>
-              <a:t>0.118</a:t>
+              <a:t>0.068</a:t>
             </a:r>
             <a:endParaRPr lang="en-US" sz="4800" dirty="0"/>
           </a:p>
@@ -2583,7 +2583,7 @@
                 <a:ea typeface="Calibri" pitchFamily="34" charset="-122"/>
                 <a:cs typeface="Calibri" pitchFamily="34" charset="-120"/>
               </a:rPr>
-              <a:t>macro-F1   |   29.0% acc</a:t>
+              <a:t>collapsed   |   31% (majority)</a:t>
             </a:r>
             <a:endParaRPr lang="en-US" sz="1100" dirty="0"/>
           </a:p>
@@ -2707,7 +2707,7 @@
                 <a:ea typeface="Calibri" pitchFamily="34" charset="-122"/>
                 <a:cs typeface="Calibri" pitchFamily="34" charset="-120"/>
               </a:rPr>
-              <a:t>BiLSTM learns 7/10 classes; Transformer needed LR=1e-4 + plateau scheduler to escape majority-class collapse on 1,043 train samples.</a:t>
+              <a:t>BiLSTM learns all 7 classes (+53% F1 vs baseline). Transformer remains data-hungry — collapses to majority-class on 2,547 train samples despite multiple config attempts.</a:t>
             </a:r>
             <a:endParaRPr lang="en-US" sz="1200" dirty="0"/>
           </a:p>
@@ -3283,7 +3283,7 @@
                 <a:ea typeface="Calibri" pitchFamily="34" charset="-122"/>
                 <a:cs typeface="Calibri" pitchFamily="34" charset="-120"/>
               </a:rPr>
-              <a:t>Subset Validation First</a:t>
+              <a:t>Subset Run, Not Full 44</a:t>
             </a:r>
             <a:endParaRPr lang="en-US" sz="1400" dirty="0"/>
           </a:p>
@@ -3379,7 +3379,7 @@
                 <a:ea typeface="Calibri" pitchFamily="34" charset="-122"/>
                 <a:cs typeface="Calibri" pitchFamily="34" charset="-120"/>
               </a:rPr>
-              <a:t>3-match pilot first</a:t>
+              <a:t>7-match overnight run</a:t>
             </a:r>
             <a:endParaRPr lang="en-US" sz="1000" dirty="0"/>
           </a:p>
@@ -3443,7 +3443,7 @@
                 <a:ea typeface="Calibri" pitchFamily="34" charset="-122"/>
                 <a:cs typeface="Calibri" pitchFamily="34" charset="-120"/>
               </a:rPr>
-              <a:t>Full run = 30+ hr on CPU. De-risked the pipeline before committing to the full data processing run.</a:t>
+              <a:t>Full 44-match run = 30+ hrs on CPU. 7 matches = 3,639 valid sequences, sufficient for pipeline validation + meaningful results.</a:t>
             </a:r>
             <a:endParaRPr lang="en-US" sz="1000" dirty="0"/>
           </a:p>
@@ -3571,7 +3571,7 @@
                 <a:ea typeface="Calibri" pitchFamily="34" charset="-122"/>
                 <a:cs typeface="Calibri" pitchFamily="34" charset="-120"/>
               </a:rPr>
-              <a:t>Lowered Detection Threshold</a:t>
+              <a:t>Class Taxonomy Refinement</a:t>
             </a:r>
             <a:endParaRPr lang="en-US" sz="1400" dirty="0"/>
           </a:p>
@@ -3630,7 +3630,7 @@
                 <a:ea typeface="Calibri" pitchFamily="34" charset="-122"/>
                 <a:cs typeface="Calibri" pitchFamily="34" charset="-120"/>
               </a:rPr>
-              <a:t>min_detection_rate = 0.7</a:t>
+              <a:t>10 classes (incl. Drive, Cross-court, Drop)</a:t>
             </a:r>
             <a:endParaRPr lang="en-US" sz="1000" dirty="0"/>
           </a:p>
@@ -3667,7 +3667,7 @@
                 <a:ea typeface="Calibri" pitchFamily="34" charset="-122"/>
                 <a:cs typeface="Calibri" pitchFamily="34" charset="-120"/>
               </a:rPr>
-              <a:t>min_detection_rate = 0.5</a:t>
+              <a:t>7 classes (Drop merged into Overhead-Soft)</a:t>
             </a:r>
             <a:endParaRPr lang="en-US" sz="1000" dirty="0"/>
           </a:p>
@@ -3731,7 +3731,7 @@
                 <a:ea typeface="Calibri" pitchFamily="34" charset="-122"/>
                 <a:cs typeface="Calibri" pitchFamily="34" charset="-120"/>
               </a:rPr>
-              <a:t>BWF broadcast = wide-angle distant cameras. At 0.7 only 32% of clips passed; at 0.5 we keep 42.5%.</a:t>
+              <a:t>Drop vs Clear pose-indistinguishable. Drive only 40 samples (untrainable). Cross-court always 0. New taxonomy is pose-discriminable.</a:t>
             </a:r>
             <a:endParaRPr lang="en-US" sz="1000" dirty="0"/>
           </a:p>
@@ -3859,7 +3859,7 @@
                 <a:ea typeface="Calibri" pitchFamily="34" charset="-122"/>
                 <a:cs typeface="Calibri" pitchFamily="34" charset="-120"/>
               </a:rPr>
-              <a:t>Sample-Level Splitting</a:t>
+              <a:t>Class Weights + Augmentation</a:t>
             </a:r>
             <a:endParaRPr lang="en-US" sz="1400" dirty="0"/>
           </a:p>
@@ -3918,7 +3918,7 @@
                 <a:ea typeface="Calibri" pitchFamily="34" charset="-122"/>
                 <a:cs typeface="Calibri" pitchFamily="34" charset="-120"/>
               </a:rPr>
-              <a:t>Match-level / LOSO split</a:t>
+              <a:t>Vanilla CE + light aug</a:t>
             </a:r>
             <a:endParaRPr lang="en-US" sz="1000" dirty="0"/>
           </a:p>
@@ -3955,7 +3955,7 @@
                 <a:ea typeface="Calibri" pitchFamily="34" charset="-122"/>
                 <a:cs typeface="Calibri" pitchFamily="34" charset="-120"/>
               </a:rPr>
-              <a:t>Stratified sample split (subset only)</a:t>
+              <a:t>Inverse-sqrt class weights + stronger aug</a:t>
             </a:r>
             <a:endParaRPr lang="en-US" sz="1000" dirty="0"/>
           </a:p>
@@ -4019,7 +4019,7 @@
                 <a:ea typeface="Calibri" pitchFamily="34" charset="-122"/>
                 <a:cs typeface="Calibri" pitchFamily="34" charset="-120"/>
               </a:rPr>
-              <a:t>int(3 × 0.15) = 0 matches → empty val/test. Sample-level fallback for ≤4 matches; LOSO returns at scale.</a:t>
+              <a:t>Class imbalance (Overhead-Soft 31%, Other 6%) hurt minority classes. Inverse-sqrt weighting + bigger aug ranges lifted minority-class F1.</a:t>
             </a:r>
             <a:endParaRPr lang="en-US" sz="1000" dirty="0"/>
           </a:p>
@@ -4147,7 +4147,7 @@
                 <a:ea typeface="Calibri" pitchFamily="34" charset="-122"/>
                 <a:cs typeface="Calibri" pitchFamily="34" charset="-120"/>
               </a:rPr>
-              <a:t>Transformer LR Tuning</a:t>
+              <a:t>Transformer Underperforms</a:t>
             </a:r>
             <a:endParaRPr lang="en-US" sz="1400" dirty="0"/>
           </a:p>
@@ -4206,7 +4206,7 @@
                 <a:ea typeface="Calibri" pitchFamily="34" charset="-122"/>
                 <a:cs typeface="Calibri" pitchFamily="34" charset="-120"/>
               </a:rPr>
-              <a:t>LR=5e-4, cosine schedule</a:t>
+              <a:t>Expected: SOTA on stroke recognition</a:t>
             </a:r>
             <a:endParaRPr lang="en-US" sz="1000" dirty="0"/>
           </a:p>
@@ -4243,7 +4243,7 @@
                 <a:ea typeface="Calibri" pitchFamily="34" charset="-122"/>
                 <a:cs typeface="Calibri" pitchFamily="34" charset="-120"/>
               </a:rPr>
-              <a:t>LR=1e-4, plateau schedule</a:t>
+              <a:t>Reality: data-starved, LSTM wins</a:t>
             </a:r>
             <a:endParaRPr lang="en-US" sz="1000" dirty="0"/>
           </a:p>
@@ -4307,7 +4307,7 @@
                 <a:ea typeface="Calibri" pitchFamily="34" charset="-122"/>
                 <a:cs typeface="Calibri" pitchFamily="34" charset="-120"/>
               </a:rPr>
-              <a:t>Original config caused immediate majority-class collapse on small subset. Lower LR + plateau let the model actually learn (F1: 0.04 → 0.12).</a:t>
+              <a:t>Spatial-Temporal Transformer needs more data than 2.5K samples. Multiple LR/scheduler/size configs tried — all collapsed to majority class. LSTM is practical winner.</a:t>
             </a:r>
             <a:endParaRPr lang="en-US" sz="1000" dirty="0"/>
           </a:p>
